--- a/figures/ch1/图1.1_本文技术路线图_可编辑.pptx
+++ b/figures/ch1/图1.1_本文技术路线图_可编辑.pptx
@@ -118,7 +118,7 @@
 <file path=ppt/revisionInfo.xml><?xml version="1.0" encoding="utf-8"?>
 <p1510:revInfo xmlns:a="http://schemas.openxmlformats.org/drawingml/2006/main" xmlns:r="http://schemas.openxmlformats.org/officeDocument/2006/relationships" xmlns:p1510="http://schemas.microsoft.com/office/powerpoint/2015/10/main">
   <p1510:revLst>
-    <p1510:client id="{18729B08-3149-B147-B919-5AB43F68C624}" v="4" dt="2026-08-10T14:09:23.091"/>
+    <p1510:client id="{18729B08-3149-B147-B919-5AB43F68C624}" v="7" dt="2026-08-23T14:00:13.886"/>
   </p1510:revLst>
 </p1510:revInfo>
 </file>
@@ -128,12 +128,12 @@
   <pc:docChgLst>
     <pc:chgData name="赫 郝" userId="eac1196edf7977d1" providerId="LiveId" clId="{06512E50-0563-545E-8A2D-AA85B947D58D}"/>
     <pc:docChg chg="undo custSel modSld">
-      <pc:chgData name="赫 郝" userId="eac1196edf7977d1" providerId="LiveId" clId="{06512E50-0563-545E-8A2D-AA85B947D58D}" dt="2026-08-10T14:09:24.977" v="55" actId="478"/>
+      <pc:chgData name="赫 郝" userId="eac1196edf7977d1" providerId="LiveId" clId="{06512E50-0563-545E-8A2D-AA85B947D58D}" dt="2026-08-23T14:00:16.954" v="70" actId="20577"/>
       <pc:docMkLst>
         <pc:docMk/>
       </pc:docMkLst>
       <pc:sldChg chg="addSp delSp modSp mod">
-        <pc:chgData name="赫 郝" userId="eac1196edf7977d1" providerId="LiveId" clId="{06512E50-0563-545E-8A2D-AA85B947D58D}" dt="2026-08-10T14:09:24.977" v="55" actId="478"/>
+        <pc:chgData name="赫 郝" userId="eac1196edf7977d1" providerId="LiveId" clId="{06512E50-0563-545E-8A2D-AA85B947D58D}" dt="2026-08-23T14:00:16.954" v="70" actId="20577"/>
         <pc:sldMkLst>
           <pc:docMk/>
           <pc:sldMk cId="1137271733" sldId="256"/>
@@ -155,7 +155,7 @@
           </ac:spMkLst>
         </pc:spChg>
         <pc:spChg chg="mod">
-          <ac:chgData name="赫 郝" userId="eac1196edf7977d1" providerId="LiveId" clId="{06512E50-0563-545E-8A2D-AA85B947D58D}" dt="2026-08-10T14:08:24.665" v="25" actId="20577"/>
+          <ac:chgData name="赫 郝" userId="eac1196edf7977d1" providerId="LiveId" clId="{06512E50-0563-545E-8A2D-AA85B947D58D}" dt="2026-08-23T13:59:43.428" v="56"/>
           <ac:spMkLst>
             <pc:docMk/>
             <pc:sldMk cId="1137271733" sldId="256"/>
@@ -203,7 +203,7 @@
           </ac:spMkLst>
         </pc:spChg>
         <pc:spChg chg="mod">
-          <ac:chgData name="赫 郝" userId="eac1196edf7977d1" providerId="LiveId" clId="{06512E50-0563-545E-8A2D-AA85B947D58D}" dt="2026-08-10T14:08:28.736" v="33" actId="20577"/>
+          <ac:chgData name="赫 郝" userId="eac1196edf7977d1" providerId="LiveId" clId="{06512E50-0563-545E-8A2D-AA85B947D58D}" dt="2026-08-23T14:00:11.144" v="58" actId="108"/>
           <ac:spMkLst>
             <pc:docMk/>
             <pc:sldMk cId="1137271733" sldId="256"/>
@@ -211,7 +211,7 @@
           </ac:spMkLst>
         </pc:spChg>
         <pc:spChg chg="mod">
-          <ac:chgData name="赫 郝" userId="eac1196edf7977d1" providerId="LiveId" clId="{06512E50-0563-545E-8A2D-AA85B947D58D}" dt="2026-08-10T14:08:30.815" v="38" actId="20577"/>
+          <ac:chgData name="赫 郝" userId="eac1196edf7977d1" providerId="LiveId" clId="{06512E50-0563-545E-8A2D-AA85B947D58D}" dt="2026-08-23T14:00:16.954" v="70" actId="20577"/>
           <ac:spMkLst>
             <pc:docMk/>
             <pc:sldMk cId="1137271733" sldId="256"/>
@@ -234,14 +234,6 @@
             <ac:spMk id="84" creationId="{13BE740C-427B-481E-9BEA-D8B4648D4DF4}"/>
           </ac:spMkLst>
         </pc:spChg>
-        <pc:cxnChg chg="del mod">
-          <ac:chgData name="赫 郝" userId="eac1196edf7977d1" providerId="LiveId" clId="{06512E50-0563-545E-8A2D-AA85B947D58D}" dt="2026-08-10T14:09:24.977" v="55" actId="478"/>
-          <ac:cxnSpMkLst>
-            <pc:docMk/>
-            <pc:sldMk cId="1137271733" sldId="256"/>
-            <ac:cxnSpMk id="264" creationId="{00000000-0000-0000-0000-000000000000}"/>
-          </ac:cxnSpMkLst>
-        </pc:cxnChg>
       </pc:sldChg>
     </pc:docChg>
   </pc:docChgLst>
@@ -2200,7 +2192,7 @@
           </a:bodyPr>
           <a:lstStyle/>
           <a:p>
-            <a:pPr algn="l">
+            <a:pPr>
               <a:defRPr sz="1275" b="1" i="0">
                 <a:solidFill>
                   <a:srgbClr val="000000"/>
@@ -2232,7 +2224,24 @@
                 <a:ea typeface="SimSun"/>
                 <a:cs typeface="Times New Roman" panose="02020603050405020304" pitchFamily="18" charset="0"/>
               </a:rPr>
-              <a:t>章：基于分层扩散模型的家庭级别大规模人口合成</a:t>
+              <a:t>章</a:t>
+            </a:r>
+            <a:r>
+              <a:rPr sz="1400" dirty="0">
+                <a:latin typeface="Times New Roman" panose="02020603050405020304" pitchFamily="18" charset="0"/>
+                <a:ea typeface="SimSun"/>
+                <a:cs typeface="Times New Roman" panose="02020603050405020304" pitchFamily="18" charset="0"/>
+              </a:rPr>
+              <a:t>：</a:t>
+            </a:r>
+            <a:r>
+              <a:rPr lang="zh-CN" altLang="zh-CN" sz="1275" b="1" dirty="0">
+                <a:solidFill>
+                  <a:srgbClr val="000000"/>
+                </a:solidFill>
+                <a:latin typeface="SimSun"/>
+              </a:rPr>
+              <a:t>面向出行分析的超大城市家庭级人口合成方法</a:t>
             </a:r>
             <a:endParaRPr sz="1400" dirty="0">
               <a:latin typeface="Times New Roman" panose="02020603050405020304" pitchFamily="18" charset="0"/>
@@ -2549,7 +2558,7 @@
           </a:bodyPr>
           <a:lstStyle/>
           <a:p>
-            <a:pPr algn="l">
+            <a:pPr>
               <a:defRPr sz="1200" b="1" i="0">
                 <a:solidFill>
                   <a:srgbClr val="000000"/>
@@ -2581,25 +2590,31 @@
                 <a:ea typeface="SimSun"/>
                 <a:cs typeface="Times New Roman" panose="02020603050405020304" pitchFamily="18" charset="0"/>
               </a:rPr>
-              <a:t>章：分阶段建模下的</a:t>
-            </a:r>
-            <a:r>
-              <a:rPr sz="1400" dirty="0" err="1">
-                <a:latin typeface="Times New Roman" panose="02020603050405020304" pitchFamily="18" charset="0"/>
-                <a:ea typeface="Times New Roman"/>
-                <a:cs typeface="Times New Roman" panose="02020603050405020304" pitchFamily="18" charset="0"/>
-              </a:rPr>
-              <a:t>MaaS</a:t>
-            </a:r>
-            <a:r>
-              <a:rPr sz="1400" dirty="0" err="1">
-                <a:latin typeface="Times New Roman" panose="02020603050405020304" pitchFamily="18" charset="0"/>
-                <a:ea typeface="SimSun"/>
-                <a:cs typeface="Times New Roman" panose="02020603050405020304" pitchFamily="18" charset="0"/>
-              </a:rPr>
-              <a:t>多阶段采纳意愿建模</a:t>
-            </a:r>
-            <a:endParaRPr sz="1400" dirty="0">
+              <a:t>章</a:t>
+            </a:r>
+            <a:r>
+              <a:rPr sz="1400" dirty="0">
+                <a:latin typeface="Times New Roman" panose="02020603050405020304" pitchFamily="18" charset="0"/>
+                <a:ea typeface="SimSun"/>
+                <a:cs typeface="Times New Roman" panose="02020603050405020304" pitchFamily="18" charset="0"/>
+              </a:rPr>
+              <a:t>：</a:t>
+            </a:r>
+            <a:r>
+              <a:rPr lang="zh-CN" altLang="zh-CN" sz="1400" b="1" dirty="0">
+                <a:solidFill>
+                  <a:srgbClr val="000000"/>
+                </a:solidFill>
+                <a:latin typeface="Times New Roman" panose="02020603050405020304" pitchFamily="18" charset="0"/>
+                <a:ea typeface="SimSun"/>
+                <a:cs typeface="Times New Roman" panose="02020603050405020304" pitchFamily="18" charset="0"/>
+              </a:rPr>
+              <a:t>MaaS多阶段采纳意愿的分阶段建模</a:t>
+            </a:r>
+            <a:endParaRPr sz="1400" b="1" dirty="0">
+              <a:solidFill>
+                <a:srgbClr val="000000"/>
+              </a:solidFill>
               <a:latin typeface="Times New Roman" panose="02020603050405020304" pitchFamily="18" charset="0"/>
               <a:ea typeface="SimSun"/>
               <a:cs typeface="Times New Roman" panose="02020603050405020304" pitchFamily="18" charset="0"/>
@@ -2641,7 +2656,7 @@
           </a:bodyPr>
           <a:lstStyle/>
           <a:p>
-            <a:pPr algn="l">
+            <a:pPr>
               <a:defRPr sz="1200" b="1" i="0">
                 <a:solidFill>
                   <a:srgbClr val="000000"/>
@@ -2673,23 +2688,48 @@
                 <a:ea typeface="SimSun"/>
                 <a:cs typeface="Times New Roman" panose="02020603050405020304" pitchFamily="18" charset="0"/>
               </a:rPr>
-              <a:t>章：一体化建模下的</a:t>
-            </a:r>
-            <a:r>
-              <a:rPr sz="1400" dirty="0" err="1">
-                <a:latin typeface="Times New Roman" panose="02020603050405020304" pitchFamily="18" charset="0"/>
-                <a:ea typeface="Times New Roman"/>
-                <a:cs typeface="Times New Roman" panose="02020603050405020304" pitchFamily="18" charset="0"/>
-              </a:rPr>
-              <a:t>MaaS</a:t>
-            </a:r>
-            <a:r>
-              <a:rPr sz="1400" dirty="0" err="1">
-                <a:latin typeface="Times New Roman" panose="02020603050405020304" pitchFamily="18" charset="0"/>
-                <a:ea typeface="SimSun"/>
-                <a:cs typeface="Times New Roman" panose="02020603050405020304" pitchFamily="18" charset="0"/>
-              </a:rPr>
-              <a:t>多阶段采纳意愿建模</a:t>
+              <a:t>章</a:t>
+            </a:r>
+            <a:r>
+              <a:rPr sz="1400" dirty="0">
+                <a:latin typeface="Times New Roman" panose="02020603050405020304" pitchFamily="18" charset="0"/>
+                <a:ea typeface="SimSun"/>
+                <a:cs typeface="Times New Roman" panose="02020603050405020304" pitchFamily="18" charset="0"/>
+              </a:rPr>
+              <a:t>：</a:t>
+            </a:r>
+            <a:r>
+              <a:rPr lang="zh-CN" altLang="zh-CN" sz="1400" b="1" dirty="0">
+                <a:solidFill>
+                  <a:srgbClr val="000000"/>
+                </a:solidFill>
+                <a:latin typeface="Times New Roman" panose="02020603050405020304" pitchFamily="18" charset="0"/>
+                <a:ea typeface="SimSun"/>
+                <a:cs typeface="Times New Roman" panose="02020603050405020304" pitchFamily="18" charset="0"/>
+              </a:rPr>
+              <a:t> MaaS多阶段采纳意愿的</a:t>
+            </a:r>
+            <a:r>
+              <a:rPr lang="zh-CN" altLang="en-US" sz="1400" b="1" dirty="0">
+                <a:solidFill>
+                  <a:srgbClr val="000000"/>
+                </a:solidFill>
+                <a:latin typeface="Times New Roman" panose="02020603050405020304" pitchFamily="18" charset="0"/>
+                <a:ea typeface="SimSun"/>
+                <a:cs typeface="Times New Roman" panose="02020603050405020304" pitchFamily="18" charset="0"/>
+              </a:rPr>
+              <a:t>一体化</a:t>
+            </a:r>
+            <a:r>
+              <a:rPr lang="zh-CN" altLang="zh-CN" sz="1400" b="1" dirty="0">
+                <a:solidFill>
+                  <a:srgbClr val="000000"/>
+                </a:solidFill>
+                <a:latin typeface="Times New Roman" panose="02020603050405020304" pitchFamily="18" charset="0"/>
+                <a:ea typeface="SimSun"/>
+                <a:cs typeface="Times New Roman" panose="02020603050405020304" pitchFamily="18" charset="0"/>
+              </a:rPr>
+              <a:t>建模</a:t>
             </a:r>
             <a:endParaRPr sz="1400" dirty="0">
               <a:latin typeface="Times New Roman" panose="02020603050405020304" pitchFamily="18" charset="0"/>
